--- a/WGRDBES-EST/presentations/WGRDBES-EST_Poster_2026.pptx
+++ b/WGRDBES-EST/presentations/WGRDBES-EST_Poster_2026.pptx
@@ -115,6 +115,18 @@
 </p:presentation>
 </file>
 
+<file path=ppt/commentAuthors.xml><?xml version="1.0" encoding="utf-8"?>
+<p:cmAuthorLst xmlns:a="http://schemas.openxmlformats.org/drawingml/2006/main" xmlns:r="http://schemas.openxmlformats.org/officeDocument/2006/relationships" xmlns:p="http://schemas.openxmlformats.org/presentationml/2006/main">
+  <p:cmAuthor id="1" name="Ana Cláudia Fernandes" initials="ACF" lastIdx="2" clrIdx="0">
+    <p:extLst>
+      <p:ext uri="{19B8F6BF-5375-455C-9EA6-DF929625EA0E}">
+        <p15:presenceInfo xmlns:p15="http://schemas.microsoft.com/office/powerpoint/2012/main" userId="91ead6e2118a4930" providerId="Windows Live"/>
+      </p:ext>
+    </p:extLst>
+  </p:cmAuthor>
+</p:cmAuthorLst>
+</file>
+
 <file path=ppt/notesMasters/notesMaster1.xml><?xml version="1.0" encoding="utf-8"?>
 <p:notesMaster xmlns:a="http://schemas.openxmlformats.org/drawingml/2006/main" xmlns:r="http://schemas.openxmlformats.org/officeDocument/2006/relationships" xmlns:p="http://schemas.openxmlformats.org/presentationml/2006/main">
   <p:cSld>
@@ -197,7 +209,7 @@
           <a:p>
             <a:fld id="{E25473D6-F22A-4683-80AA-3BFD6B73D44D}" type="datetimeFigureOut">
               <a:rPr lang="en-GB" smtClean="0"/>
-              <a:t>22/04/2026</a:t>
+              <a:t>05/05/2026</a:t>
             </a:fld>
             <a:endParaRPr lang="en-GB"/>
           </a:p>
@@ -679,7 +691,7 @@
           <a:p>
             <a:fld id="{9B034FC8-44DB-4E67-BB48-13AC67F4EBA8}" type="datetimeFigureOut">
               <a:rPr lang="en-GB" smtClean="0"/>
-              <a:t>22/04/2026</a:t>
+              <a:t>05/05/2026</a:t>
             </a:fld>
             <a:endParaRPr lang="en-GB"/>
           </a:p>
@@ -832,7 +844,7 @@
           <a:p>
             <a:fld id="{9B034FC8-44DB-4E67-BB48-13AC67F4EBA8}" type="datetimeFigureOut">
               <a:rPr lang="en-GB" smtClean="0"/>
-              <a:t>22/04/2026</a:t>
+              <a:t>05/05/2026</a:t>
             </a:fld>
             <a:endParaRPr lang="en-GB"/>
           </a:p>
@@ -1049,7 +1061,7 @@
           <a:p>
             <a:fld id="{9B034FC8-44DB-4E67-BB48-13AC67F4EBA8}" type="datetimeFigureOut">
               <a:rPr lang="en-GB" smtClean="0"/>
-              <a:t>22/04/2026</a:t>
+              <a:t>05/05/2026</a:t>
             </a:fld>
             <a:endParaRPr lang="en-GB"/>
           </a:p>
@@ -5054,7 +5066,16 @@
                 </a:solidFill>
                 <a:latin typeface="Segoe UI"/>
               </a:rPr>
-              <a:t>Current work includes design-based and ratio-estimation approaches, preparation of zeros and NAs from species-list information, and generation of outputs compatible with</a:t>
+              <a:t>Current work includes design-based and ratio-estimation approaches, preparation of zeros and NAs from species-list </a:t>
+            </a:r>
+            <a:r>
+              <a:rPr sz="2200" dirty="0">
+                <a:solidFill>
+                  <a:schemeClr val="tx2"/>
+                </a:solidFill>
+                <a:latin typeface="Segoe UI"/>
+              </a:rPr>
+              <a:t>information, and generation of outputs compatible with</a:t>
             </a:r>
             <a:r>
               <a:rPr lang="en-US" sz="2200" dirty="0">
@@ -5063,7 +5084,7 @@
                 </a:solidFill>
                 <a:latin typeface="Segoe UI"/>
               </a:rPr>
-              <a:t> Catch Estimation Framework</a:t>
+              <a:t> Catch Estimates Format</a:t>
             </a:r>
             <a:r>
               <a:rPr lang="et-EE" sz="2200" dirty="0">
@@ -5075,22 +5096,13 @@
               <a:t> (CEF) </a:t>
             </a:r>
             <a:r>
-              <a:rPr lang="et-EE" sz="2200" dirty="0" err="1">
+              <a:rPr sz="2200" dirty="0">
                 <a:solidFill>
                   <a:schemeClr val="tx2"/>
                 </a:solidFill>
                 <a:latin typeface="Segoe UI"/>
               </a:rPr>
-              <a:t>format</a:t>
-            </a:r>
-            <a:r>
-              <a:rPr sz="2200" b="0" dirty="0">
-                <a:solidFill>
-                  <a:schemeClr val="tx2"/>
-                </a:solidFill>
-                <a:latin typeface="Segoe UI"/>
-              </a:rPr>
-              <a:t> and downstream assessment use.</a:t>
+              <a:t>and downstream assessment use.</a:t>
             </a:r>
           </a:p>
           <a:p>
@@ -5198,7 +5210,7 @@
                 <a:buNone/>
               </a:pPr>
               <a:r>
-                <a:rPr sz="2400" b="0" dirty="0" err="1">
+                <a:rPr sz="2400" b="1" dirty="0" err="1">
                   <a:solidFill>
                     <a:schemeClr val="bg1"/>
                   </a:solidFill>
@@ -5443,7 +5455,7 @@
         <p:spPr>
           <a:xfrm>
             <a:off x="11368770" y="13140708"/>
-            <a:ext cx="6135947" cy="5262979"/>
+            <a:ext cx="6135947" cy="6878806"/>
           </a:xfrm>
           <a:prstGeom prst="rect">
             <a:avLst/>
@@ -5456,31 +5468,63 @@
           </a:bodyPr>
           <a:lstStyle/>
           <a:p>
-            <a:pPr marL="457200" indent="-457200" algn="l">
-              <a:spcAft>
-                <a:spcPts val="0"/>
-              </a:spcAft>
-              <a:buFont typeface="Wingdings" panose="05000000000000000000" pitchFamily="2" charset="2"/>
-              <a:buNone/>
-            </a:pPr>
-            <a:r>
-              <a:rPr sz="2100" b="0" dirty="0">
+            <a:r>
+              <a:rPr sz="2100" dirty="0">
                 <a:solidFill>
                   <a:schemeClr val="bg1"/>
                 </a:solidFill>
                 <a:latin typeface="Segoe UI"/>
               </a:rPr>
-              <a:t>Our expertise spans survey sampling, fisheries data analysis, R package development and reproducible analytical workflows.</a:t>
+              <a:t>Our expertise spans</a:t>
+            </a:r>
+            <a:r>
+              <a:rPr lang="en-US" sz="2100" dirty="0">
+                <a:solidFill>
+                  <a:schemeClr val="bg1"/>
+                </a:solidFill>
+                <a:latin typeface="Segoe UI"/>
+              </a:rPr>
+              <a:t> </a:t>
+            </a:r>
+            <a:r>
+              <a:rPr lang="pt-PT" sz="2100" dirty="0">
+                <a:solidFill>
+                  <a:schemeClr val="bg1"/>
+                </a:solidFill>
+                <a:latin typeface="Segoe UI"/>
+              </a:rPr>
+              <a:t>comercial fisheries </a:t>
+            </a:r>
+            <a:r>
+              <a:rPr sz="2100" dirty="0">
+                <a:solidFill>
+                  <a:schemeClr val="bg1"/>
+                </a:solidFill>
+                <a:latin typeface="Segoe UI"/>
+              </a:rPr>
+              <a:t>sampling</a:t>
+            </a:r>
+            <a:r>
+              <a:rPr lang="pt-PT" sz="2100" dirty="0">
+                <a:solidFill>
+                  <a:schemeClr val="bg1"/>
+                </a:solidFill>
+                <a:latin typeface="Segoe UI"/>
+              </a:rPr>
+              <a:t> </a:t>
+            </a:r>
+            <a:r>
+              <a:rPr sz="2100" dirty="0">
+                <a:solidFill>
+                  <a:schemeClr val="bg1"/>
+                </a:solidFill>
+                <a:latin typeface="Segoe UI"/>
+              </a:rPr>
+              <a:t>data analysis, R package development and reproducible analytical workflows.</a:t>
             </a:r>
           </a:p>
           <a:p>
-            <a:pPr algn="l">
-              <a:spcAft>
-                <a:spcPts val="0"/>
-              </a:spcAft>
-              <a:buNone/>
-            </a:pPr>
-            <a:endParaRPr sz="2100" b="0" dirty="0">
+            <a:endParaRPr sz="2100" dirty="0">
               <a:solidFill>
                 <a:schemeClr val="bg1"/>
               </a:solidFill>
@@ -5488,14 +5532,8 @@
             </a:endParaRPr>
           </a:p>
           <a:p>
-            <a:pPr algn="l">
-              <a:spcAft>
-                <a:spcPts val="0"/>
-              </a:spcAft>
-              <a:buNone/>
-            </a:pPr>
-            <a:r>
-              <a:rPr sz="2100" b="0" dirty="0">
+            <a:r>
+              <a:rPr sz="2100" dirty="0">
                 <a:solidFill>
                   <a:schemeClr val="bg1"/>
                 </a:solidFill>
@@ -5504,7 +5542,7 @@
               <a:t>The current </a:t>
             </a:r>
             <a:r>
-              <a:rPr sz="2100" b="0" dirty="0" err="1">
+              <a:rPr sz="2100" b="1" dirty="0" err="1">
                 <a:solidFill>
                   <a:schemeClr val="bg1"/>
                 </a:solidFill>
@@ -5513,23 +5551,33 @@
               <a:t>RDBEScore</a:t>
             </a:r>
             <a:r>
-              <a:rPr sz="2100" b="0" dirty="0">
+              <a:rPr sz="2100" dirty="0">
                 <a:solidFill>
                   <a:schemeClr val="bg1"/>
                 </a:solidFill>
                 <a:latin typeface="Segoe UI"/>
               </a:rPr>
-              <a:t> development supports creation and validation of RDBES data objects, tidying and linking of hierarchy tables, estimation across strata, biological-variable estimation and export of results for assessment data calls.</a:t>
-            </a:r>
-          </a:p>
-          <a:p>
-            <a:pPr algn="l">
-              <a:spcAft>
-                <a:spcPts val="0"/>
-              </a:spcAft>
-              <a:buNone/>
-            </a:pPr>
-            <a:endParaRPr sz="2100" b="0" dirty="0">
+              <a:t> </a:t>
+            </a:r>
+            <a:r>
+              <a:rPr lang="pt-PT" sz="2100" dirty="0">
+                <a:solidFill>
+                  <a:schemeClr val="bg1"/>
+                </a:solidFill>
+                <a:latin typeface="Segoe UI"/>
+              </a:rPr>
+              <a:t>package </a:t>
+            </a:r>
+            <a:r>
+              <a:rPr sz="2100" dirty="0">
+                <a:solidFill>
+                  <a:schemeClr val="bg1"/>
+                </a:solidFill>
+                <a:latin typeface="Segoe UI"/>
+              </a:rPr>
+              <a:t>development supports creation and validation of RDBES data objects, tidying and linking of hierarchy tables, estimation across strata, biological-variable estimation and export of results for assessment data calls.</a:t>
+            </a:r>
+            <a:endParaRPr lang="pt-PT" sz="2100" dirty="0">
               <a:solidFill>
                 <a:schemeClr val="bg1"/>
               </a:solidFill>
@@ -5537,22 +5585,7 @@
             </a:endParaRPr>
           </a:p>
           <a:p>
-            <a:pPr algn="l">
-              <a:spcAft>
-                <a:spcPts val="0"/>
-              </a:spcAft>
-              <a:buNone/>
-            </a:pPr>
-            <a:r>
-              <a:rPr sz="2100" b="0" dirty="0">
-                <a:solidFill>
-                  <a:schemeClr val="bg1"/>
-                </a:solidFill>
-                <a:latin typeface="Segoe UI"/>
-              </a:rPr>
-              <a:t>We also contribute to documentation, vignettes, peer review and recommendations on RDBES data-model development.</a:t>
-            </a:r>
-            <a:endParaRPr lang="et-EE" sz="2100" b="0" dirty="0">
+            <a:endParaRPr lang="pt-PT" sz="2100" dirty="0">
               <a:solidFill>
                 <a:schemeClr val="bg1"/>
               </a:solidFill>
@@ -5560,12 +5593,94 @@
             </a:endParaRPr>
           </a:p>
           <a:p>
-            <a:pPr algn="l">
-              <a:spcAft>
-                <a:spcPts val="0"/>
-              </a:spcAft>
-              <a:buNone/>
-            </a:pPr>
+            <a:r>
+              <a:rPr lang="pt-PT" sz="2100" dirty="0">
+                <a:solidFill>
+                  <a:schemeClr val="bg1"/>
+                </a:solidFill>
+                <a:latin typeface="Segoe UI"/>
+              </a:rPr>
+              <a:t>The </a:t>
+            </a:r>
+            <a:r>
+              <a:rPr lang="pt-PT" sz="2100" b="1" dirty="0">
+                <a:solidFill>
+                  <a:schemeClr val="bg1"/>
+                </a:solidFill>
+                <a:latin typeface="Segoe UI"/>
+              </a:rPr>
+              <a:t>RDBESvisualise</a:t>
+            </a:r>
+            <a:r>
+              <a:rPr lang="pt-PT" sz="2100" dirty="0">
+                <a:solidFill>
+                  <a:schemeClr val="bg1"/>
+                </a:solidFill>
+                <a:latin typeface="Segoe UI"/>
+              </a:rPr>
+              <a:t> package development aims to provide tools that allow exploring that RDBES data and produce overviews built on them.</a:t>
+            </a:r>
+            <a:endParaRPr sz="2100" dirty="0">
+              <a:solidFill>
+                <a:schemeClr val="bg1"/>
+              </a:solidFill>
+              <a:latin typeface="Segoe UI"/>
+            </a:endParaRPr>
+          </a:p>
+          <a:p>
+            <a:endParaRPr sz="2100" dirty="0">
+              <a:solidFill>
+                <a:schemeClr val="bg1"/>
+              </a:solidFill>
+              <a:latin typeface="Segoe UI"/>
+            </a:endParaRPr>
+          </a:p>
+          <a:p>
+            <a:r>
+              <a:rPr sz="2100" dirty="0">
+                <a:solidFill>
+                  <a:schemeClr val="bg1"/>
+                </a:solidFill>
+                <a:latin typeface="Segoe UI"/>
+              </a:rPr>
+              <a:t>We also contribute to documentation, vignettes, peer review</a:t>
+            </a:r>
+            <a:r>
+              <a:rPr lang="pt-PT" sz="2100" dirty="0">
+                <a:solidFill>
+                  <a:schemeClr val="bg1"/>
+                </a:solidFill>
+                <a:latin typeface="Segoe UI"/>
+              </a:rPr>
+              <a:t>,</a:t>
+            </a:r>
+            <a:r>
+              <a:rPr sz="2100" dirty="0">
+                <a:solidFill>
+                  <a:schemeClr val="bg1"/>
+                </a:solidFill>
+                <a:latin typeface="Segoe UI"/>
+              </a:rPr>
+              <a:t> and </a:t>
+            </a:r>
+            <a:r>
+              <a:rPr lang="pt-PT" sz="2100" dirty="0">
+                <a:solidFill>
+                  <a:schemeClr val="bg1"/>
+                </a:solidFill>
+                <a:latin typeface="Segoe UI"/>
+              </a:rPr>
+              <a:t>provide </a:t>
+            </a:r>
+            <a:r>
+              <a:rPr sz="2100" dirty="0">
+                <a:solidFill>
+                  <a:schemeClr val="bg1"/>
+                </a:solidFill>
+                <a:latin typeface="Segoe UI"/>
+              </a:rPr>
+              <a:t>recommendations on RDBES data-model development.</a:t>
+            </a:r>
             <a:endParaRPr lang="et-EE" sz="2100" dirty="0">
               <a:solidFill>
                 <a:schemeClr val="bg1"/>
@@ -5574,92 +5689,22 @@
             </a:endParaRPr>
           </a:p>
           <a:p>
-            <a:pPr algn="l">
-              <a:spcAft>
-                <a:spcPts val="0"/>
-              </a:spcAft>
-              <a:buNone/>
-            </a:pPr>
-            <a:r>
-              <a:rPr lang="et-EE" sz="2100" b="0" dirty="0" err="1">
+            <a:endParaRPr lang="et-EE" sz="2100" dirty="0">
+              <a:solidFill>
+                <a:schemeClr val="bg1"/>
+              </a:solidFill>
+              <a:latin typeface="Segoe UI"/>
+            </a:endParaRPr>
+          </a:p>
+          <a:p>
+            <a:r>
+              <a:rPr lang="et-EE" sz="2100" dirty="0" err="1">
                 <a:solidFill>
                   <a:schemeClr val="bg1"/>
                 </a:solidFill>
                 <a:latin typeface="Segoe UI"/>
               </a:rPr>
               <a:t>We</a:t>
-            </a:r>
-            <a:r>
-              <a:rPr lang="et-EE" sz="2100" b="0" dirty="0">
-                <a:solidFill>
-                  <a:schemeClr val="bg1"/>
-                </a:solidFill>
-                <a:latin typeface="Segoe UI"/>
-              </a:rPr>
-              <a:t> are </a:t>
-            </a:r>
-            <a:r>
-              <a:rPr lang="et-EE" sz="2100" b="0" dirty="0" err="1">
-                <a:solidFill>
-                  <a:schemeClr val="bg1"/>
-                </a:solidFill>
-                <a:latin typeface="Segoe UI"/>
-              </a:rPr>
-              <a:t>open</a:t>
-            </a:r>
-            <a:r>
-              <a:rPr lang="et-EE" sz="2100" b="0" dirty="0">
-                <a:solidFill>
-                  <a:schemeClr val="bg1"/>
-                </a:solidFill>
-                <a:latin typeface="Segoe UI"/>
-              </a:rPr>
-              <a:t> </a:t>
-            </a:r>
-            <a:r>
-              <a:rPr lang="et-EE" sz="2100" b="0" dirty="0" err="1">
-                <a:solidFill>
-                  <a:schemeClr val="bg1"/>
-                </a:solidFill>
-                <a:latin typeface="Segoe UI"/>
-              </a:rPr>
-              <a:t>to</a:t>
-            </a:r>
-            <a:r>
-              <a:rPr lang="et-EE" sz="2100" b="0" dirty="0">
-                <a:solidFill>
-                  <a:schemeClr val="bg1"/>
-                </a:solidFill>
-                <a:latin typeface="Segoe UI"/>
-              </a:rPr>
-              <a:t> </a:t>
-            </a:r>
-            <a:r>
-              <a:rPr lang="et-EE" sz="2100" b="0" dirty="0" err="1">
-                <a:solidFill>
-                  <a:schemeClr val="bg1"/>
-                </a:solidFill>
-                <a:latin typeface="Segoe UI"/>
-              </a:rPr>
-              <a:t>new</a:t>
-            </a:r>
-            <a:r>
-              <a:rPr lang="et-EE" sz="2100" b="0" dirty="0">
-                <a:solidFill>
-                  <a:schemeClr val="bg1"/>
-                </a:solidFill>
-                <a:latin typeface="Segoe UI"/>
-              </a:rPr>
-              <a:t> </a:t>
-            </a:r>
-            <a:r>
-              <a:rPr lang="et-EE" sz="2100" b="0" dirty="0" err="1">
-                <a:solidFill>
-                  <a:schemeClr val="bg1"/>
-                </a:solidFill>
-                <a:latin typeface="Segoe UI"/>
-              </a:rPr>
-              <a:t>contributors</a:t>
             </a:r>
             <a:r>
               <a:rPr lang="et-EE" sz="2100" dirty="0">
@@ -5671,6 +5716,60 @@
               <a:t> </a:t>
             </a:r>
             <a:r>
+              <a:rPr lang="pt-PT" sz="2100" dirty="0">
+                <a:solidFill>
+                  <a:schemeClr val="bg1"/>
+                </a:solidFill>
+                <a:latin typeface="Segoe UI"/>
+              </a:rPr>
+              <a:t>welcome </a:t>
+            </a:r>
+            <a:r>
+              <a:rPr lang="et-EE" sz="2100" dirty="0" err="1">
+                <a:solidFill>
+                  <a:schemeClr val="bg1"/>
+                </a:solidFill>
+                <a:latin typeface="Segoe UI"/>
+              </a:rPr>
+              <a:t>new</a:t>
+            </a:r>
+            <a:r>
+              <a:rPr lang="et-EE" sz="2100" dirty="0">
+                <a:solidFill>
+                  <a:schemeClr val="bg1"/>
+                </a:solidFill>
+                <a:latin typeface="Segoe UI"/>
+              </a:rPr>
+              <a:t> </a:t>
+            </a:r>
+            <a:r>
+              <a:rPr lang="et-EE" sz="2100" dirty="0" err="1">
+                <a:solidFill>
+                  <a:schemeClr val="bg1"/>
+                </a:solidFill>
+                <a:latin typeface="Segoe UI"/>
+              </a:rPr>
+              <a:t>contributors</a:t>
+            </a:r>
+            <a:r>
+              <a:rPr lang="et-EE" sz="2100" dirty="0">
+                <a:solidFill>
+                  <a:schemeClr val="bg1"/>
+                </a:solidFill>
+                <a:latin typeface="Segoe UI"/>
+              </a:rPr>
+              <a:t> </a:t>
+            </a:r>
+            <a:r>
+              <a:rPr lang="pt-PT" sz="2100" dirty="0">
+                <a:solidFill>
+                  <a:schemeClr val="bg1"/>
+                </a:solidFill>
+                <a:latin typeface="Segoe UI"/>
+              </a:rPr>
+              <a:t>who are interested in </a:t>
+            </a:r>
+            <a:r>
               <a:rPr lang="et-EE" sz="2100" dirty="0" err="1">
                 <a:solidFill>
                   <a:schemeClr val="bg1"/>
@@ -5695,16 +5794,16 @@
                 </a:solidFill>
                 <a:latin typeface="Segoe UI"/>
               </a:rPr>
-              <a:t>the</a:t>
-            </a:r>
-            <a:r>
-              <a:rPr lang="et-EE" sz="2100" dirty="0">
+              <a:t>th</a:t>
+            </a:r>
+            <a:r>
+              <a:rPr lang="pt-PT" sz="2100" dirty="0">
                 <a:solidFill>
                   <a:schemeClr val="bg1"/>
                 </a:solidFill>
                 <a:latin typeface="Segoe UI"/>
               </a:rPr>
-              <a:t> </a:t>
+              <a:t>is </a:t>
             </a:r>
             <a:r>
               <a:rPr lang="et-EE" sz="2100" dirty="0" err="1">
@@ -5713,7 +5812,25 @@
                 </a:solidFill>
                 <a:latin typeface="Segoe UI"/>
               </a:rPr>
-              <a:t>workgroup</a:t>
+              <a:t>work</a:t>
+            </a:r>
+            <a:r>
+              <a:rPr lang="pt-PT" sz="2100" dirty="0">
+                <a:solidFill>
+                  <a:schemeClr val="bg1"/>
+                </a:solidFill>
+                <a:latin typeface="Segoe UI"/>
+              </a:rPr>
+              <a:t>ing </a:t>
+            </a:r>
+            <a:r>
+              <a:rPr lang="et-EE" sz="2100" dirty="0" err="1">
+                <a:solidFill>
+                  <a:schemeClr val="bg1"/>
+                </a:solidFill>
+                <a:latin typeface="Segoe UI"/>
+              </a:rPr>
+              <a:t>group</a:t>
             </a:r>
             <a:r>
               <a:rPr lang="et-EE" sz="2100" dirty="0">
@@ -5724,7 +5841,7 @@
               </a:rPr>
               <a:t>.</a:t>
             </a:r>
-            <a:endParaRPr sz="2100" b="0" dirty="0">
+            <a:endParaRPr sz="2100" dirty="0">
               <a:solidFill>
                 <a:schemeClr val="bg1"/>
               </a:solidFill>
@@ -6308,6 +6425,30 @@
 </file>
 
 <file path=customXml/item1.xml><?xml version="1.0" encoding="utf-8"?>
+<?mso-contentType ?>
+<FormTemplates xmlns="http://schemas.microsoft.com/sharepoint/v3/contenttype/forms">
+  <Display>DocumentLibraryForm</Display>
+  <Edit>DocumentLibraryForm</Edit>
+  <New>DocumentLibraryForm</New>
+</FormTemplates>
+</file>
+
+<file path=customXml/item2.xml><?xml version="1.0" encoding="utf-8"?>
+<p:properties xmlns:p="http://schemas.microsoft.com/office/2006/metadata/properties" xmlns:xsi="http://www.w3.org/2001/XMLSchema-instance" xmlns:pc="http://schemas.microsoft.com/office/infopath/2007/PartnerControls">
+  <documentManagement>
+    <SharedWithUsers xmlns="c47f6974-2345-4997-91b1-c52c30586ff7">
+      <UserInfo>
+        <DisplayName/>
+        <AccountId xsi:nil="true"/>
+        <AccountType/>
+      </UserInfo>
+    </SharedWithUsers>
+    <_activity xmlns="9a29517f-2255-4a56-8bed-c44b84ebd303" xsi:nil="true"/>
+  </documentManagement>
+</p:properties>
+</file>
+
+<file path=customXml/item3.xml><?xml version="1.0" encoding="utf-8"?>
 <ct:contentTypeSchema xmlns:ct="http://schemas.microsoft.com/office/2006/metadata/contentType" xmlns:ma="http://schemas.microsoft.com/office/2006/metadata/properties/metaAttributes" ct:_="" ma:_="" ma:contentTypeName="Dokument" ma:contentTypeID="0x01010050A1501C2C152B478F611F2D02F2C39B" ma:contentTypeVersion="18" ma:contentTypeDescription="Loo uus dokument" ma:contentTypeScope="" ma:versionID="f8a051bd53a1c65c8ebb2db3d47699d4">
   <xsd:schema xmlns:xsd="http://www.w3.org/2001/XMLSchema" xmlns:xs="http://www.w3.org/2001/XMLSchema" xmlns:p="http://schemas.microsoft.com/office/2006/metadata/properties" xmlns:ns3="c47f6974-2345-4997-91b1-c52c30586ff7" xmlns:ns4="9a29517f-2255-4a56-8bed-c44b84ebd303" targetNamespace="http://schemas.microsoft.com/office/2006/metadata/properties" ma:root="true" ma:fieldsID="7e445827f1b8cc3870b3d0579064d343" ns3:_="" ns4:_="">
     <xsd:import namespace="c47f6974-2345-4997-91b1-c52c30586ff7"/>
@@ -6560,31 +6701,32 @@
 </ct:contentTypeSchema>
 </file>
 
-<file path=customXml/item2.xml><?xml version="1.0" encoding="utf-8"?>
-<p:properties xmlns:p="http://schemas.microsoft.com/office/2006/metadata/properties" xmlns:xsi="http://www.w3.org/2001/XMLSchema-instance" xmlns:pc="http://schemas.microsoft.com/office/infopath/2007/PartnerControls">
-  <documentManagement>
-    <SharedWithUsers xmlns="c47f6974-2345-4997-91b1-c52c30586ff7">
-      <UserInfo>
-        <DisplayName/>
-        <AccountId xsi:nil="true"/>
-        <AccountType/>
-      </UserInfo>
-    </SharedWithUsers>
-    <_activity xmlns="9a29517f-2255-4a56-8bed-c44b84ebd303" xsi:nil="true"/>
-  </documentManagement>
-</p:properties>
+<file path=customXml/itemProps1.xml><?xml version="1.0" encoding="utf-8"?>
+<ds:datastoreItem xmlns:ds="http://schemas.openxmlformats.org/officeDocument/2006/customXml" ds:itemID="{62EC039A-C861-4250-9B8D-E29EB3A233A5}">
+  <ds:schemaRefs>
+    <ds:schemaRef ds:uri="http://schemas.microsoft.com/sharepoint/v3/contenttype/forms"/>
+  </ds:schemaRefs>
+</ds:datastoreItem>
 </file>
 
-<file path=customXml/item3.xml><?xml version="1.0" encoding="utf-8"?>
-<?mso-contentType ?>
-<FormTemplates xmlns="http://schemas.microsoft.com/sharepoint/v3/contenttype/forms">
-  <Display>DocumentLibraryForm</Display>
-  <Edit>DocumentLibraryForm</Edit>
-  <New>DocumentLibraryForm</New>
-</FormTemplates>
+<file path=customXml/itemProps2.xml><?xml version="1.0" encoding="utf-8"?>
+<ds:datastoreItem xmlns:ds="http://schemas.openxmlformats.org/officeDocument/2006/customXml" ds:itemID="{87373D17-745A-42D5-84C6-C50D34E9E048}">
+  <ds:schemaRefs>
+    <ds:schemaRef ds:uri="http://www.w3.org/XML/1998/namespace"/>
+    <ds:schemaRef ds:uri="http://purl.org/dc/elements/1.1/"/>
+    <ds:schemaRef ds:uri="http://schemas.openxmlformats.org/package/2006/metadata/core-properties"/>
+    <ds:schemaRef ds:uri="http://schemas.microsoft.com/office/2006/documentManagement/types"/>
+    <ds:schemaRef ds:uri="http://purl.org/dc/terms/"/>
+    <ds:schemaRef ds:uri="http://purl.org/dc/dcmitype/"/>
+    <ds:schemaRef ds:uri="9a29517f-2255-4a56-8bed-c44b84ebd303"/>
+    <ds:schemaRef ds:uri="http://schemas.microsoft.com/office/infopath/2007/PartnerControls"/>
+    <ds:schemaRef ds:uri="c47f6974-2345-4997-91b1-c52c30586ff7"/>
+    <ds:schemaRef ds:uri="http://schemas.microsoft.com/office/2006/metadata/properties"/>
+  </ds:schemaRefs>
+</ds:datastoreItem>
 </file>
 
-<file path=customXml/itemProps1.xml><?xml version="1.0" encoding="utf-8"?>
+<file path=customXml/itemProps3.xml><?xml version="1.0" encoding="utf-8"?>
 <ds:datastoreItem xmlns:ds="http://schemas.openxmlformats.org/officeDocument/2006/customXml" ds:itemID="{5C2D2FBD-197F-4BBD-A424-D8FDE7F0373B}">
   <ds:schemaRefs>
     <ds:schemaRef ds:uri="http://schemas.microsoft.com/office/2006/metadata/contentType"/>
@@ -6601,29 +6743,4 @@
     <ds:schemaRef ds:uri="http://schemas.microsoft.com/internal/obd"/>
   </ds:schemaRefs>
 </ds:datastoreItem>
-</file>
-
-<file path=customXml/itemProps2.xml><?xml version="1.0" encoding="utf-8"?>
-<ds:datastoreItem xmlns:ds="http://schemas.openxmlformats.org/officeDocument/2006/customXml" ds:itemID="{87373D17-745A-42D5-84C6-C50D34E9E048}">
-  <ds:schemaRefs>
-    <ds:schemaRef ds:uri="http://purl.org/dc/elements/1.1/"/>
-    <ds:schemaRef ds:uri="http://schemas.microsoft.com/office/2006/documentManagement/types"/>
-    <ds:schemaRef ds:uri="http://purl.org/dc/dcmitype/"/>
-    <ds:schemaRef ds:uri="c47f6974-2345-4997-91b1-c52c30586ff7"/>
-    <ds:schemaRef ds:uri="http://schemas.microsoft.com/office/2006/metadata/properties"/>
-    <ds:schemaRef ds:uri="http://www.w3.org/XML/1998/namespace"/>
-    <ds:schemaRef ds:uri="http://purl.org/dc/terms/"/>
-    <ds:schemaRef ds:uri="http://schemas.microsoft.com/office/infopath/2007/PartnerControls"/>
-    <ds:schemaRef ds:uri="http://schemas.openxmlformats.org/package/2006/metadata/core-properties"/>
-    <ds:schemaRef ds:uri="9a29517f-2255-4a56-8bed-c44b84ebd303"/>
-  </ds:schemaRefs>
-</ds:datastoreItem>
-</file>
-
-<file path=customXml/itemProps3.xml><?xml version="1.0" encoding="utf-8"?>
-<ds:datastoreItem xmlns:ds="http://schemas.openxmlformats.org/officeDocument/2006/customXml" ds:itemID="{62EC039A-C861-4250-9B8D-E29EB3A233A5}">
-  <ds:schemaRefs>
-    <ds:schemaRef ds:uri="http://schemas.microsoft.com/sharepoint/v3/contenttype/forms"/>
-  </ds:schemaRefs>
-</ds:datastoreItem>
 </file>